--- a/experiments/BioShield_class_presentation.pptx
+++ b/experiments/BioShield_class_presentation.pptx
@@ -3609,7 +3609,7 @@
                 </a:solidFill>
                 <a:latin typeface="Calibri"/>
               </a:rPr>
-              <a:t>AUC 0.982  ·  F1 0.947  ·  Evasion 0.00</a:t>
+              <a:t>AUC 0.9993  ·  F1 0.9797  ·  Evasion 0.007</a:t>
             </a:r>
           </a:p>
         </p:txBody>
@@ -3762,7 +3762,7 @@
                 </a:solidFill>
                 <a:latin typeface="Calibri"/>
               </a:rPr>
-              <a:t>AUC 0.982  ·  F1 0.947  ·  Evasion 0.00</a:t>
+              <a:t>AUC 0.9993  ·  F1 0.9797  ·  Evasion 0.007</a:t>
             </a:r>
           </a:p>
         </p:txBody>
@@ -4117,7 +4117,7 @@
                 </a:solidFill>
                 <a:latin typeface="Calibri"/>
               </a:rPr>
-              <a:t>96%</a:t>
+              <a:t>98%</a:t>
             </a:r>
           </a:p>
         </p:txBody>
@@ -4308,7 +4308,7 @@
 Our detector was trained only on PubMed + BioMistral.
 It learned the style of one generator family.
 When shown GPT-4 output from Wikipedia articles, it labels
-them "human" 96% of the time.</a:t>
+them "human" 98% of the time.</a:t>
             </a:r>
           </a:p>
         </p:txBody>
@@ -4698,8 +4698,8 @@
                 </a:solidFill>
                 <a:latin typeface="Calibri"/>
               </a:rPr>
-              <a:t>After:   set_seed(42 + round_idx) inside the loop → rounds diverge → evasion curve emerges
-             0.74 → 0.64 → 0.54  (this is literally why Slide 9 exists).</a:t>
+              <a:t>After:   set_seed(42 + round_idx) inside the loop → each round produces different fakes
+             and different rewrites. Verified by hash-diff across 3k-scale round_data/.</a:t>
             </a:r>
           </a:p>
         </p:txBody>
@@ -4887,7 +4887,7 @@
                 </a:solidFill>
                 <a:latin typeface="Calibri"/>
               </a:rPr>
-              <a:t>Both fixes verified in the 500-scale run. If we'd shipped with these bugs, the paper would have lied.</a:t>
+              <a:t>Both fixes verified at 3k scale. If we'd shipped with these bugs, the paper would have lied.</a:t>
             </a:r>
           </a:p>
         </p:txBody>
@@ -5054,7 +5054,7 @@
                 </a:solidFill>
                 <a:latin typeface="Calibri"/>
               </a:rPr>
-              <a:t>All four conditions on one M3 Max laptop, under 7 hours</a:t>
+              <a:t>All four conditions on one M3 Max laptop, 10 h 01 m</a:t>
             </a:r>
           </a:p>
         </p:txBody>
@@ -5089,7 +5089,7 @@
                 </a:solidFill>
                 <a:latin typeface="Calibri"/>
               </a:rPr>
-              <a:t>Pipeline wall-clock (17:42 → 00:05)</a:t>
+              <a:t>Pipeline wall-clock (13:26 → 23:27)</a:t>
             </a:r>
           </a:p>
         </p:txBody>
@@ -5212,7 +5212,7 @@
                 </a:solidFill>
                 <a:latin typeface="Calibri"/>
               </a:rPr>
-              <a:t>Data prep (500 fakes)</a:t>
+              <a:t>Data prep (1,500 fakes)</a:t>
             </a:r>
           </a:p>
         </p:txBody>
@@ -5247,7 +5247,7 @@
                 </a:solidFill>
                 <a:latin typeface="Calibri"/>
               </a:rPr>
-              <a:t>1 h 23 m</a:t>
+              <a:t>3 h 55 m</a:t>
             </a:r>
           </a:p>
         </p:txBody>
@@ -5405,7 +5405,7 @@
                 </a:solidFill>
                 <a:latin typeface="Calibri"/>
               </a:rPr>
-              <a:t>6 m</a:t>
+              <a:t>13 m</a:t>
             </a:r>
           </a:p>
         </p:txBody>
@@ -5563,7 +5563,7 @@
                 </a:solidFill>
                 <a:latin typeface="Calibri"/>
               </a:rPr>
-              <a:t>27 m</a:t>
+              <a:t>56 m</a:t>
             </a:r>
           </a:p>
         </p:txBody>
@@ -5721,7 +5721,7 @@
                 </a:solidFill>
                 <a:latin typeface="Calibri"/>
               </a:rPr>
-              <a:t>1 h 59 m</a:t>
+              <a:t>2 h 05 m</a:t>
             </a:r>
           </a:p>
         </p:txBody>
@@ -5879,7 +5879,7 @@
                 </a:solidFill>
                 <a:latin typeface="Calibri"/>
               </a:rPr>
-              <a:t>2 h 27 m</a:t>
+              <a:t>2 h 52 m</a:t>
             </a:r>
           </a:p>
         </p:txBody>
@@ -6196,7 +6196,7 @@
                 </a:solidFill>
                 <a:latin typeface="Calibri"/>
               </a:rPr>
-              <a:t>Total run: 6 h 23 m end-to-end</a:t>
+              <a:t>Total run: 10 h 01 m end-to-end</a:t>
             </a:r>
           </a:p>
         </p:txBody>
@@ -6274,7 +6274,7 @@
                 </a:solidFill>
                 <a:latin typeface="Calibri"/>
               </a:rPr>
-              <a:t>Samples produced: 3,984</a:t>
+              <a:t>Samples produced: 5,622 (+200 RAID eval)</a:t>
             </a:r>
           </a:p>
         </p:txBody>
@@ -6352,7 +6352,7 @@
                 </a:solidFill>
                 <a:latin typeface="Calibri"/>
               </a:rPr>
-              <a:t>Peak memory: 52 GB / 64 GB</a:t>
+              <a:t>Peak memory: ~25 GB / 64 GB (bf16, MPS)</a:t>
             </a:r>
           </a:p>
         </p:txBody>
@@ -6989,7 +6989,7 @@
                 </a:solidFill>
                 <a:latin typeface="Calibri"/>
               </a:rPr>
-              <a:t>Adversarial training works.</a:t>
+              <a:t>Generator family dominates — 100× spread.</a:t>
             </a:r>
           </a:p>
         </p:txBody>
@@ -7024,9 +7024,9 @@
                 </a:solidFill>
                 <a:latin typeface="Calibri"/>
               </a:rPr>
-              <a:t>Condition B shows evasion rate dropping 0.74 → 0.54 across 3 rounds.
-The detector genuinely learns from the adversarial loop. This is the
-headline finding of the project.</a:t>
+              <a:t>SeqGAN 99% evasion · BioMistral 0.7% · RAID 98% — same detector, same test set.
+The family the detector was trained against matters more than rounds, rewrites,
+or any retraining schedule. This is the headline finding at 3k scale.</a:t>
             </a:r>
           </a:p>
         </p:txBody>
@@ -7184,7 +7184,7 @@
                 </a:solidFill>
                 <a:latin typeface="Calibri"/>
               </a:rPr>
-              <a:t>Your baseline choice matters.</a:t>
+              <a:t>Adversarial retraining did not help at 3k.</a:t>
             </a:r>
           </a:p>
         </p:txBody>
@@ -7219,9 +7219,9 @@
                 </a:solidFill>
                 <a:latin typeface="Calibri"/>
               </a:rPr>
-              <a:t>Zero-shot LLM fakes were too easy — Conditions C and D gave identical numbers
-because the detector had nothing to improve against. Future runs need a
-LoRA-hardened generator to show the full-pipeline story.</a:t>
+              <a:t>Condition B stayed flat (99.3 → 98.0 → 98.7% evasion). Conditions C and D produced
+byte-identical metrics because the best-val-AUC checkpoint locked onto round 0.
+Lesson: harder generators + adversarial-aware checkpoint selection are needed.</a:t>
             </a:r>
           </a:p>
         </p:txBody>
@@ -7379,7 +7379,7 @@
                 </a:solidFill>
                 <a:latin typeface="Calibri"/>
               </a:rPr>
-              <a:t>Robustness is domain-specific.</a:t>
+              <a:t>Specialist &gt; universal for this problem.</a:t>
             </a:r>
           </a:p>
         </p:txBody>
@@ -7414,9 +7414,9 @@
                 </a:solidFill>
                 <a:latin typeface="Calibri"/>
               </a:rPr>
-              <a:t>RAID evasion 0.96 — our detector doesn't generalize beyond biomedical.
-We position BioShield as a specialist, not a universal AI-text detector.
-Cross-domain training is the obvious future-work section.</a:t>
+              <a:t>RAID evasion 0.98 — our detector doesn't generalize beyond biomedical.
+We position BioShield as a biomedical specialist, not a universal AI-text detector.
+Cross-domain training and a generator-family matrix are the future-work hooks.</a:t>
             </a:r>
           </a:p>
         </p:txBody>
@@ -7881,7 +7881,7 @@
                 </a:solidFill>
                 <a:latin typeface="Calibri"/>
               </a:rPr>
-              <a:t>500 real + 500 fake</a:t>
+              <a:t>1,500 real + 1,500 fake</a:t>
             </a:r>
           </a:p>
         </p:txBody>
@@ -8205,7 +8205,7 @@
                 </a:solidFill>
                 <a:latin typeface="Calibri"/>
               </a:rPr>
-              <a:t>~4 k</a:t>
+              <a:t>~5.6 k</a:t>
             </a:r>
           </a:p>
         </p:txBody>
@@ -8240,7 +8240,7 @@
                 </a:solidFill>
                 <a:latin typeface="Calibri"/>
               </a:rPr>
-              <a:t>~10 k</a:t>
+              <a:t>~9.7 k</a:t>
             </a:r>
           </a:p>
         </p:txBody>
@@ -8345,7 +8345,7 @@
                 </a:solidFill>
                 <a:latin typeface="Calibri"/>
               </a:rPr>
-              <a:t>n=100 · ±5%</a:t>
+              <a:t>n=300 · ±2.9%</a:t>
             </a:r>
           </a:p>
         </p:txBody>
@@ -8380,7 +8380,7 @@
                 </a:solidFill>
                 <a:latin typeface="Calibri"/>
               </a:rPr>
-              <a:t>n=200 · ±3.5%</a:t>
+              <a:t>n=400 · ±2.5%</a:t>
             </a:r>
           </a:p>
         </p:txBody>
@@ -8415,7 +8415,7 @@
                 </a:solidFill>
                 <a:latin typeface="Calibri"/>
               </a:rPr>
-              <a:t>n=1,000 · ±1.5%</a:t>
+              <a:t>n=2,000 · ±1.1%</a:t>
             </a:r>
           </a:p>
         </p:txBody>
@@ -8529,7 +8529,7 @@
                 </a:solidFill>
                 <a:latin typeface="Calibri"/>
               </a:rPr>
-              <a:t>6 h 23 m</a:t>
+              <a:t>10 h 01 m</a:t>
             </a:r>
           </a:p>
         </p:txBody>
@@ -8564,7 +8564,7 @@
                 </a:solidFill>
                 <a:latin typeface="Calibri"/>
               </a:rPr>
-              <a:t>~24 h (a weekend)</a:t>
+              <a:t>~16 h (overnight)</a:t>
             </a:r>
           </a:p>
         </p:txBody>
@@ -8599,7 +8599,7 @@
                 </a:solidFill>
                 <a:latin typeface="Calibri"/>
               </a:rPr>
-              <a:t>~80 h (~3.3 days)</a:t>
+              <a:t>~65 h (~2.7 days)</a:t>
             </a:r>
           </a:p>
         </p:txBody>
@@ -8712,7 +8712,7 @@
                 </a:solidFill>
                 <a:latin typeface="Calibri"/>
               </a:rPr>
-              <a:t>Batch BioMistral generation (batch=4) → cuts 80 h run to ~50 h</a:t>
+              <a:t>Batch BioMistral generation (batch=4) → cuts 65 h run to ~40 h</a:t>
             </a:r>
           </a:p>
         </p:txBody>
@@ -9340,7 +9340,7 @@
                 </a:solidFill>
                 <a:latin typeface="Calibri"/>
               </a:rPr>
-              <a:t>Built with ❤️ on a single M3 Max laptop   ·   6 h 23 m wall-clock   ·   zero cloud spend</a:t>
+              <a:t>Built with ❤️ on a single M3 Max laptop   ·   10 h 01 m wall-clock   ·   zero cloud spend</a:t>
             </a:r>
           </a:p>
         </p:txBody>
@@ -12745,7 +12745,7 @@
                 </a:solidFill>
                 <a:latin typeface="Calibri"/>
               </a:rPr>
-              <a:t>500 + 500 = 1,000 starting samples</a:t>
+              <a:t>1,500 + 1,500 = 3,000 starting samples</a:t>
             </a:r>
           </a:p>
         </p:txBody>
@@ -12861,7 +12861,7 @@
                 </a:solidFill>
                 <a:latin typeface="Calibri"/>
               </a:rPr>
-              <a:t>500 human-written PubMed abstracts</a:t>
+              <a:t>1,500 human-written PubMed abstracts</a:t>
             </a:r>
           </a:p>
         </p:txBody>
@@ -13016,7 +13016,7 @@
                 </a:solidFill>
                 <a:latin typeface="Calibri"/>
               </a:rPr>
-              <a:t>500 BioMistral-7B zero-shot fakes</a:t>
+              <a:t>1,500 BioMistral-7B zero-shot fakes</a:t>
             </a:r>
           </a:p>
         </p:txBody>
@@ -13302,7 +13302,7 @@
                 </a:solidFill>
                 <a:latin typeface="Calibri"/>
               </a:rPr>
-              <a:t>TRAIN  800 rows  (400 real / 400 fake)</a:t>
+              <a:t>TRAIN  2,400 rows  (1,200 real / 1,200 fake)</a:t>
             </a:r>
           </a:p>
         </p:txBody>
@@ -13337,7 +13337,7 @@
                 </a:solidFill>
                 <a:latin typeface="Calibri"/>
               </a:rPr>
-              <a:t>VAL  100</a:t>
+              <a:t>VAL  300</a:t>
             </a:r>
           </a:p>
         </p:txBody>
@@ -13372,7 +13372,7 @@
                 </a:solidFill>
                 <a:latin typeface="Calibri"/>
               </a:rPr>
-              <a:t>TEST  100</a:t>
+              <a:t>TEST  300</a:t>
             </a:r>
           </a:p>
         </p:txBody>
@@ -13407,7 +13407,7 @@
                 </a:solidFill>
                 <a:latin typeface="Calibri"/>
               </a:rPr>
-              <a:t>By the end of the run, we had generated 3,984 total samples across all conditions.</a:t>
+              <a:t>By the end of the run, we had generated 5,622 total samples across all conditions.</a:t>
             </a:r>
           </a:p>
         </p:txBody>
@@ -14972,8 +14972,8 @@
         </p:nvSpPr>
         <p:spPr>
           <a:xfrm>
-            <a:off x="1371600" y="2011680"/>
-            <a:ext cx="4572000" cy="1828800"/>
+            <a:off x="914400" y="2011680"/>
+            <a:ext cx="5486400" cy="1828800"/>
           </a:xfrm>
           <a:prstGeom prst="rect">
             <a:avLst/>
@@ -14988,13 +14988,13 @@
           <a:p>
             <a:pPr algn="ctr"/>
             <a:r>
-              <a:rPr sz="16000" b="1">
+              <a:rPr sz="14000" b="1">
                 <a:solidFill>
                   <a:srgbClr val="1F3A5F"/>
                 </a:solidFill>
                 <a:latin typeface="Calibri"/>
               </a:rPr>
-              <a:t>0.989</a:t>
+              <a:t>0.9997</a:t>
             </a:r>
           </a:p>
         </p:txBody>
@@ -15007,8 +15007,8 @@
         </p:nvSpPr>
         <p:spPr>
           <a:xfrm>
-            <a:off x="1371600" y="3840480"/>
-            <a:ext cx="4572000" cy="457200"/>
+            <a:off x="914400" y="3840480"/>
+            <a:ext cx="5486400" cy="457200"/>
           </a:xfrm>
           <a:prstGeom prst="rect">
             <a:avLst/>
@@ -15110,7 +15110,7 @@
                 </a:solidFill>
                 <a:latin typeface="Calibri"/>
               </a:rPr>
-              <a:t>Supporting metrics (n=100 test)</a:t>
+              <a:t>Supporting metrics (n=300 test)</a:t>
             </a:r>
           </a:p>
         </p:txBody>
@@ -15180,7 +15180,7 @@
                 </a:solidFill>
                 <a:latin typeface="Calibri"/>
               </a:rPr>
-              <a:t>0.938</a:t>
+              <a:t>0.9797</a:t>
             </a:r>
           </a:p>
         </p:txBody>
@@ -15250,7 +15250,7 @@
                 </a:solidFill>
                 <a:latin typeface="Calibri"/>
               </a:rPr>
-              <a:t>94%</a:t>
+              <a:t>98%</a:t>
             </a:r>
           </a:p>
         </p:txBody>
@@ -15320,7 +15320,7 @@
                 </a:solidFill>
                 <a:latin typeface="Calibri"/>
               </a:rPr>
-              <a:t>0.999</a:t>
+              <a:t>0.9990</a:t>
             </a:r>
           </a:p>
         </p:txBody>
@@ -15390,7 +15390,7 @@
                 </a:solidFill>
                 <a:latin typeface="Calibri"/>
               </a:rPr>
-              <a:t>286 seconds</a:t>
+              <a:t>730 seconds</a:t>
             </a:r>
           </a:p>
         </p:txBody>
@@ -15460,7 +15460,7 @@
                 </a:solidFill>
                 <a:latin typeface="Calibri"/>
               </a:rPr>
-              <a:t>± 5 percentage points</a:t>
+              <a:t>± 2.9 percentage points</a:t>
             </a:r>
           </a:p>
         </p:txBody>
@@ -15495,7 +15495,7 @@
                 </a:solidFill>
                 <a:latin typeface="Calibri"/>
               </a:rPr>
-              <a:t>In plain English: the detector catches ~94 out of 100 fake abstracts on its first try.</a:t>
+              <a:t>In plain English: the detector catches ~98 out of 100 fake abstracts on its first try.</a:t>
             </a:r>
           </a:p>
         </p:txBody>
@@ -15627,7 +15627,7 @@
                 </a:solidFill>
                 <a:latin typeface="Calibri"/>
               </a:rPr>
-              <a:t>Result 2: Adversarial training actually works</a:t>
+              <a:t>Result 2: Generator family dominates — not rounds</a:t>
             </a:r>
           </a:p>
         </p:txBody>
@@ -15662,45 +15662,21 @@
                 </a:solidFill>
                 <a:latin typeface="Calibri"/>
               </a:rPr>
-              <a:t>Condition B — evasion drops 27% over 3 rounds (THE paper finding)</a:t>
-            </a:r>
-          </a:p>
-        </p:txBody>
-      </p:sp>
-      <p:pic>
-        <p:nvPicPr>
-          <p:cNvPr id="5" name="Picture 4" descr="evasion_rate_vs_round.png"/>
-          <p:cNvPicPr>
-            <a:picLocks noChangeAspect="1"/>
-          </p:cNvPicPr>
-          <p:nvPr/>
-        </p:nvPicPr>
-        <p:blipFill>
-          <a:blip r:embed="rId2"/>
-          <a:stretch>
-            <a:fillRect/>
-          </a:stretch>
-        </p:blipFill>
-        <p:spPr>
-          <a:xfrm>
-            <a:off x="457200" y="1645920"/>
-            <a:ext cx="6858000" cy="4754880"/>
-          </a:xfrm>
-          <a:prstGeom prst="rect">
-            <a:avLst/>
-          </a:prstGeom>
-        </p:spPr>
-      </p:pic>
-      <p:sp>
-        <p:nvSpPr>
-          <p:cNvPr id="6" name="Rectangle 5"/>
+              <a:t>Evasion rate, final round, by fake source — same detector, 100× spread</a:t>
+            </a:r>
+          </a:p>
+        </p:txBody>
+      </p:sp>
+      <p:sp>
+        <p:nvSpPr>
+          <p:cNvPr id="5" name="Rectangle 4"/>
           <p:cNvSpPr/>
           <p:nvPr/>
         </p:nvSpPr>
         <p:spPr>
           <a:xfrm>
-            <a:off x="7680960" y="1737360"/>
-            <a:ext cx="4206240" cy="4572000"/>
+            <a:off x="457200" y="1828800"/>
+            <a:ext cx="3657600" cy="3200400"/>
           </a:xfrm>
           <a:prstGeom prst="rect">
             <a:avLst/>
@@ -15739,399 +15715,570 @@
       </p:sp>
       <p:sp>
         <p:nvSpPr>
+          <p:cNvPr id="6" name="TextBox 5"/>
+          <p:cNvSpPr txBox="1"/>
+          <p:nvPr/>
+        </p:nvSpPr>
+        <p:spPr>
+          <a:xfrm>
+            <a:off x="457200" y="1965960"/>
+            <a:ext cx="3657600" cy="365760"/>
+          </a:xfrm>
+          <a:prstGeom prst="rect">
+            <a:avLst/>
+          </a:prstGeom>
+          <a:noFill/>
+        </p:spPr>
+        <p:txBody>
+          <a:bodyPr wrap="square">
+            <a:spAutoFit/>
+          </a:bodyPr>
+          <a:lstStyle/>
+          <a:p>
+            <a:pPr algn="ctr"/>
+            <a:r>
+              <a:rPr sz="1600" b="1">
+                <a:solidFill>
+                  <a:srgbClr val="E06C75"/>
+                </a:solidFill>
+                <a:latin typeface="Calibri"/>
+              </a:rPr>
+              <a:t>SeqGAN</a:t>
+            </a:r>
+          </a:p>
+        </p:txBody>
+      </p:sp>
+      <p:sp>
+        <p:nvSpPr>
           <p:cNvPr id="7" name="TextBox 6"/>
           <p:cNvSpPr txBox="1"/>
           <p:nvPr/>
         </p:nvSpPr>
         <p:spPr>
           <a:xfrm>
-            <a:off x="7863840" y="1874519"/>
-            <a:ext cx="3931920" cy="365760"/>
-          </a:xfrm>
-          <a:prstGeom prst="rect">
-            <a:avLst/>
-          </a:prstGeom>
-          <a:noFill/>
-        </p:spPr>
-        <p:txBody>
-          <a:bodyPr wrap="square">
-            <a:spAutoFit/>
-          </a:bodyPr>
-          <a:lstStyle/>
-          <a:p>
-            <a:pPr algn="l"/>
+            <a:off x="457200" y="2331720"/>
+            <a:ext cx="3657600" cy="1645920"/>
+          </a:xfrm>
+          <a:prstGeom prst="rect">
+            <a:avLst/>
+          </a:prstGeom>
+          <a:noFill/>
+        </p:spPr>
+        <p:txBody>
+          <a:bodyPr wrap="square">
+            <a:spAutoFit/>
+          </a:bodyPr>
+          <a:lstStyle/>
+          <a:p>
+            <a:pPr algn="ctr"/>
+            <a:r>
+              <a:rPr sz="11000" b="1">
+                <a:solidFill>
+                  <a:srgbClr val="E06C75"/>
+                </a:solidFill>
+                <a:latin typeface="Calibri"/>
+              </a:rPr>
+              <a:t>99%</a:t>
+            </a:r>
+          </a:p>
+        </p:txBody>
+      </p:sp>
+      <p:sp>
+        <p:nvSpPr>
+          <p:cNvPr id="8" name="TextBox 7"/>
+          <p:cNvSpPr txBox="1"/>
+          <p:nvPr/>
+        </p:nvSpPr>
+        <p:spPr>
+          <a:xfrm>
+            <a:off x="457200" y="4114800"/>
+            <a:ext cx="3657600" cy="365760"/>
+          </a:xfrm>
+          <a:prstGeom prst="rect">
+            <a:avLst/>
+          </a:prstGeom>
+          <a:noFill/>
+        </p:spPr>
+        <p:txBody>
+          <a:bodyPr wrap="square">
+            <a:spAutoFit/>
+          </a:bodyPr>
+          <a:lstStyle/>
+          <a:p>
+            <a:pPr algn="ctr"/>
+            <a:r>
+              <a:rPr sz="1400" b="0">
+                <a:solidFill>
+                  <a:srgbClr val="555555"/>
+                </a:solidFill>
+                <a:latin typeface="Calibri"/>
+              </a:rPr>
+              <a:t>evasion</a:t>
+            </a:r>
+          </a:p>
+        </p:txBody>
+      </p:sp>
+      <p:sp>
+        <p:nvSpPr>
+          <p:cNvPr id="9" name="TextBox 8"/>
+          <p:cNvSpPr txBox="1"/>
+          <p:nvPr/>
+        </p:nvSpPr>
+        <p:spPr>
+          <a:xfrm>
+            <a:off x="457200" y="4480560"/>
+            <a:ext cx="3657600" cy="365760"/>
+          </a:xfrm>
+          <a:prstGeom prst="rect">
+            <a:avLst/>
+          </a:prstGeom>
+          <a:noFill/>
+        </p:spPr>
+        <p:txBody>
+          <a:bodyPr wrap="square">
+            <a:spAutoFit/>
+          </a:bodyPr>
+          <a:lstStyle/>
+          <a:p>
+            <a:pPr algn="ctr"/>
+            <a:r>
+              <a:rPr sz="1200" b="0">
+                <a:solidFill>
+                  <a:srgbClr val="555555"/>
+                </a:solidFill>
+                <a:latin typeface="Calibri"/>
+              </a:rPr>
+              <a:t>Condition B · 3 retrain rounds · flat</a:t>
+            </a:r>
+          </a:p>
+        </p:txBody>
+      </p:sp>
+      <p:sp>
+        <p:nvSpPr>
+          <p:cNvPr id="10" name="Rectangle 9"/>
+          <p:cNvSpPr/>
+          <p:nvPr/>
+        </p:nvSpPr>
+        <p:spPr>
+          <a:xfrm>
+            <a:off x="4270248" y="1828800"/>
+            <a:ext cx="3657600" cy="3200400"/>
+          </a:xfrm>
+          <a:prstGeom prst="rect">
+            <a:avLst/>
+          </a:prstGeom>
+          <a:solidFill>
+            <a:srgbClr val="F5F5F0"/>
+          </a:solidFill>
+          <a:ln>
+            <a:solidFill>
+              <a:srgbClr val="598B2C"/>
+            </a:solidFill>
+          </a:ln>
+          <a:effectLst/>
+        </p:spPr>
+        <p:style>
+          <a:lnRef idx="1">
+            <a:schemeClr val="accent1"/>
+          </a:lnRef>
+          <a:fillRef idx="3">
+            <a:schemeClr val="accent1"/>
+          </a:fillRef>
+          <a:effectRef idx="2">
+            <a:schemeClr val="accent1"/>
+          </a:effectRef>
+          <a:fontRef idx="minor">
+            <a:schemeClr val="lt1"/>
+          </a:fontRef>
+        </p:style>
+        <p:txBody>
+          <a:bodyPr rtlCol="0" anchor="ctr"/>
+          <a:lstStyle/>
+          <a:p>
+            <a:pPr algn="ctr"/>
+          </a:p>
+        </p:txBody>
+      </p:sp>
+      <p:sp>
+        <p:nvSpPr>
+          <p:cNvPr id="11" name="TextBox 10"/>
+          <p:cNvSpPr txBox="1"/>
+          <p:nvPr/>
+        </p:nvSpPr>
+        <p:spPr>
+          <a:xfrm>
+            <a:off x="4270248" y="1965960"/>
+            <a:ext cx="3657600" cy="365760"/>
+          </a:xfrm>
+          <a:prstGeom prst="rect">
+            <a:avLst/>
+          </a:prstGeom>
+          <a:noFill/>
+        </p:spPr>
+        <p:txBody>
+          <a:bodyPr wrap="square">
+            <a:spAutoFit/>
+          </a:bodyPr>
+          <a:lstStyle/>
+          <a:p>
+            <a:pPr algn="ctr"/>
             <a:r>
               <a:rPr sz="1600" b="1">
                 <a:solidFill>
+                  <a:srgbClr val="598B2C"/>
+                </a:solidFill>
+                <a:latin typeface="Calibri"/>
+              </a:rPr>
+              <a:t>BioMistral</a:t>
+            </a:r>
+          </a:p>
+        </p:txBody>
+      </p:sp>
+      <p:sp>
+        <p:nvSpPr>
+          <p:cNvPr id="12" name="TextBox 11"/>
+          <p:cNvSpPr txBox="1"/>
+          <p:nvPr/>
+        </p:nvSpPr>
+        <p:spPr>
+          <a:xfrm>
+            <a:off x="4270248" y="2331720"/>
+            <a:ext cx="3657600" cy="1645920"/>
+          </a:xfrm>
+          <a:prstGeom prst="rect">
+            <a:avLst/>
+          </a:prstGeom>
+          <a:noFill/>
+        </p:spPr>
+        <p:txBody>
+          <a:bodyPr wrap="square">
+            <a:spAutoFit/>
+          </a:bodyPr>
+          <a:lstStyle/>
+          <a:p>
+            <a:pPr algn="ctr"/>
+            <a:r>
+              <a:rPr sz="11000" b="1">
+                <a:solidFill>
+                  <a:srgbClr val="598B2C"/>
+                </a:solidFill>
+                <a:latin typeface="Calibri"/>
+              </a:rPr>
+              <a:t>0.7%</a:t>
+            </a:r>
+          </a:p>
+        </p:txBody>
+      </p:sp>
+      <p:sp>
+        <p:nvSpPr>
+          <p:cNvPr id="13" name="TextBox 12"/>
+          <p:cNvSpPr txBox="1"/>
+          <p:nvPr/>
+        </p:nvSpPr>
+        <p:spPr>
+          <a:xfrm>
+            <a:off x="4270248" y="4114800"/>
+            <a:ext cx="3657600" cy="365760"/>
+          </a:xfrm>
+          <a:prstGeom prst="rect">
+            <a:avLst/>
+          </a:prstGeom>
+          <a:noFill/>
+        </p:spPr>
+        <p:txBody>
+          <a:bodyPr wrap="square">
+            <a:spAutoFit/>
+          </a:bodyPr>
+          <a:lstStyle/>
+          <a:p>
+            <a:pPr algn="ctr"/>
+            <a:r>
+              <a:rPr sz="1400" b="0">
+                <a:solidFill>
+                  <a:srgbClr val="555555"/>
+                </a:solidFill>
+                <a:latin typeface="Calibri"/>
+              </a:rPr>
+              <a:t>evasion</a:t>
+            </a:r>
+          </a:p>
+        </p:txBody>
+      </p:sp>
+      <p:sp>
+        <p:nvSpPr>
+          <p:cNvPr id="14" name="TextBox 13"/>
+          <p:cNvSpPr txBox="1"/>
+          <p:nvPr/>
+        </p:nvSpPr>
+        <p:spPr>
+          <a:xfrm>
+            <a:off x="4270248" y="4480560"/>
+            <a:ext cx="3657600" cy="365760"/>
+          </a:xfrm>
+          <a:prstGeom prst="rect">
+            <a:avLst/>
+          </a:prstGeom>
+          <a:noFill/>
+        </p:spPr>
+        <p:txBody>
+          <a:bodyPr wrap="square">
+            <a:spAutoFit/>
+          </a:bodyPr>
+          <a:lstStyle/>
+          <a:p>
+            <a:pPr algn="ctr"/>
+            <a:r>
+              <a:rPr sz="1200" b="0">
+                <a:solidFill>
+                  <a:srgbClr val="555555"/>
+                </a:solidFill>
+                <a:latin typeface="Calibri"/>
+              </a:rPr>
+              <a:t>Conditions C + D · near-ceiling</a:t>
+            </a:r>
+          </a:p>
+        </p:txBody>
+      </p:sp>
+      <p:sp>
+        <p:nvSpPr>
+          <p:cNvPr id="15" name="Rectangle 14"/>
+          <p:cNvSpPr/>
+          <p:nvPr/>
+        </p:nvSpPr>
+        <p:spPr>
+          <a:xfrm>
+            <a:off x="8074152" y="1828800"/>
+            <a:ext cx="3657600" cy="3200400"/>
+          </a:xfrm>
+          <a:prstGeom prst="rect">
+            <a:avLst/>
+          </a:prstGeom>
+          <a:solidFill>
+            <a:srgbClr val="F5F5F0"/>
+          </a:solidFill>
+          <a:ln>
+            <a:solidFill>
+              <a:srgbClr val="1F3A5F"/>
+            </a:solidFill>
+          </a:ln>
+          <a:effectLst/>
+        </p:spPr>
+        <p:style>
+          <a:lnRef idx="1">
+            <a:schemeClr val="accent1"/>
+          </a:lnRef>
+          <a:fillRef idx="3">
+            <a:schemeClr val="accent1"/>
+          </a:fillRef>
+          <a:effectRef idx="2">
+            <a:schemeClr val="accent1"/>
+          </a:effectRef>
+          <a:fontRef idx="minor">
+            <a:schemeClr val="lt1"/>
+          </a:fontRef>
+        </p:style>
+        <p:txBody>
+          <a:bodyPr rtlCol="0" anchor="ctr"/>
+          <a:lstStyle/>
+          <a:p>
+            <a:pPr algn="ctr"/>
+          </a:p>
+        </p:txBody>
+      </p:sp>
+      <p:sp>
+        <p:nvSpPr>
+          <p:cNvPr id="16" name="TextBox 15"/>
+          <p:cNvSpPr txBox="1"/>
+          <p:nvPr/>
+        </p:nvSpPr>
+        <p:spPr>
+          <a:xfrm>
+            <a:off x="8074152" y="1965960"/>
+            <a:ext cx="3657600" cy="365760"/>
+          </a:xfrm>
+          <a:prstGeom prst="rect">
+            <a:avLst/>
+          </a:prstGeom>
+          <a:noFill/>
+        </p:spPr>
+        <p:txBody>
+          <a:bodyPr wrap="square">
+            <a:spAutoFit/>
+          </a:bodyPr>
+          <a:lstStyle/>
+          <a:p>
+            <a:pPr algn="ctr"/>
+            <a:r>
+              <a:rPr sz="1600" b="1">
+                <a:solidFill>
                   <a:srgbClr val="1F3A5F"/>
                 </a:solidFill>
                 <a:latin typeface="Calibri"/>
               </a:rPr>
-              <a:t>Evasion rate per round</a:t>
-            </a:r>
-          </a:p>
-        </p:txBody>
-      </p:sp>
-      <p:sp>
-        <p:nvSpPr>
-          <p:cNvPr id="8" name="TextBox 7"/>
-          <p:cNvSpPr txBox="1"/>
-          <p:nvPr/>
-        </p:nvSpPr>
-        <p:spPr>
-          <a:xfrm>
-            <a:off x="7863840" y="2377440"/>
-            <a:ext cx="1371600" cy="365760"/>
-          </a:xfrm>
-          <a:prstGeom prst="rect">
-            <a:avLst/>
-          </a:prstGeom>
-          <a:noFill/>
-        </p:spPr>
-        <p:txBody>
-          <a:bodyPr wrap="square">
-            <a:spAutoFit/>
-          </a:bodyPr>
-          <a:lstStyle/>
-          <a:p>
-            <a:pPr algn="l"/>
-            <a:r>
-              <a:rPr sz="1400" b="1">
+              <a:t>RAID (cross-domain)</a:t>
+            </a:r>
+          </a:p>
+        </p:txBody>
+      </p:sp>
+      <p:sp>
+        <p:nvSpPr>
+          <p:cNvPr id="17" name="TextBox 16"/>
+          <p:cNvSpPr txBox="1"/>
+          <p:nvPr/>
+        </p:nvSpPr>
+        <p:spPr>
+          <a:xfrm>
+            <a:off x="8074152" y="2331720"/>
+            <a:ext cx="3657600" cy="1645920"/>
+          </a:xfrm>
+          <a:prstGeom prst="rect">
+            <a:avLst/>
+          </a:prstGeom>
+          <a:noFill/>
+        </p:spPr>
+        <p:txBody>
+          <a:bodyPr wrap="square">
+            <a:spAutoFit/>
+          </a:bodyPr>
+          <a:lstStyle/>
+          <a:p>
+            <a:pPr algn="ctr"/>
+            <a:r>
+              <a:rPr sz="11000" b="1">
+                <a:solidFill>
+                  <a:srgbClr val="1F3A5F"/>
+                </a:solidFill>
+                <a:latin typeface="Calibri"/>
+              </a:rPr>
+              <a:t>98%</a:t>
+            </a:r>
+          </a:p>
+        </p:txBody>
+      </p:sp>
+      <p:sp>
+        <p:nvSpPr>
+          <p:cNvPr id="18" name="TextBox 17"/>
+          <p:cNvSpPr txBox="1"/>
+          <p:nvPr/>
+        </p:nvSpPr>
+        <p:spPr>
+          <a:xfrm>
+            <a:off x="8074152" y="4114800"/>
+            <a:ext cx="3657600" cy="365760"/>
+          </a:xfrm>
+          <a:prstGeom prst="rect">
+            <a:avLst/>
+          </a:prstGeom>
+          <a:noFill/>
+        </p:spPr>
+        <p:txBody>
+          <a:bodyPr wrap="square">
+            <a:spAutoFit/>
+          </a:bodyPr>
+          <a:lstStyle/>
+          <a:p>
+            <a:pPr algn="ctr"/>
+            <a:r>
+              <a:rPr sz="1400" b="0">
                 <a:solidFill>
                   <a:srgbClr val="555555"/>
                 </a:solidFill>
                 <a:latin typeface="Calibri"/>
               </a:rPr>
-              <a:t>Round 1</a:t>
-            </a:r>
-          </a:p>
-        </p:txBody>
-      </p:sp>
-      <p:sp>
-        <p:nvSpPr>
-          <p:cNvPr id="9" name="TextBox 8"/>
-          <p:cNvSpPr txBox="1"/>
-          <p:nvPr/>
-        </p:nvSpPr>
-        <p:spPr>
-          <a:xfrm>
-            <a:off x="9235440" y="2377440"/>
-            <a:ext cx="914400" cy="457200"/>
-          </a:xfrm>
-          <a:prstGeom prst="rect">
-            <a:avLst/>
-          </a:prstGeom>
-          <a:noFill/>
-        </p:spPr>
-        <p:txBody>
-          <a:bodyPr wrap="square">
-            <a:spAutoFit/>
-          </a:bodyPr>
-          <a:lstStyle/>
-          <a:p>
-            <a:pPr algn="l"/>
-            <a:r>
-              <a:rPr sz="2400" b="1">
-                <a:solidFill>
-                  <a:srgbClr val="1F3A5F"/>
-                </a:solidFill>
-                <a:latin typeface="Calibri"/>
-              </a:rPr>
-              <a:t>0.74</a:t>
-            </a:r>
-          </a:p>
-        </p:txBody>
-      </p:sp>
-      <p:sp>
-        <p:nvSpPr>
-          <p:cNvPr id="10" name="TextBox 9"/>
-          <p:cNvSpPr txBox="1"/>
-          <p:nvPr/>
-        </p:nvSpPr>
-        <p:spPr>
-          <a:xfrm>
-            <a:off x="7863840" y="2834640"/>
-            <a:ext cx="3931920" cy="320040"/>
-          </a:xfrm>
-          <a:prstGeom prst="rect">
-            <a:avLst/>
-          </a:prstGeom>
-          <a:noFill/>
-        </p:spPr>
-        <p:txBody>
-          <a:bodyPr wrap="square">
-            <a:spAutoFit/>
-          </a:bodyPr>
-          <a:lstStyle/>
-          <a:p>
-            <a:pPr algn="l"/>
-            <a:r>
-              <a:rPr sz="1100" b="0">
+              <a:t>evasion</a:t>
+            </a:r>
+          </a:p>
+        </p:txBody>
+      </p:sp>
+      <p:sp>
+        <p:nvSpPr>
+          <p:cNvPr id="19" name="TextBox 18"/>
+          <p:cNvSpPr txBox="1"/>
+          <p:nvPr/>
+        </p:nvSpPr>
+        <p:spPr>
+          <a:xfrm>
+            <a:off x="8074152" y="4480560"/>
+            <a:ext cx="3657600" cy="365760"/>
+          </a:xfrm>
+          <a:prstGeom prst="rect">
+            <a:avLst/>
+          </a:prstGeom>
+          <a:noFill/>
+        </p:spPr>
+        <p:txBody>
+          <a:bodyPr wrap="square">
+            <a:spAutoFit/>
+          </a:bodyPr>
+          <a:lstStyle/>
+          <a:p>
+            <a:pPr algn="ctr"/>
+            <a:r>
+              <a:rPr sz="1200" b="0">
                 <a:solidFill>
                   <a:srgbClr val="555555"/>
                 </a:solidFill>
                 <a:latin typeface="Calibri"/>
               </a:rPr>
-              <a:t>74% of fakes slip through</a:t>
-            </a:r>
-          </a:p>
-        </p:txBody>
-      </p:sp>
-      <p:sp>
-        <p:nvSpPr>
-          <p:cNvPr id="11" name="TextBox 10"/>
-          <p:cNvSpPr txBox="1"/>
-          <p:nvPr/>
-        </p:nvSpPr>
-        <p:spPr>
-          <a:xfrm>
-            <a:off x="7863840" y="3200400"/>
-            <a:ext cx="1371600" cy="365760"/>
-          </a:xfrm>
-          <a:prstGeom prst="rect">
-            <a:avLst/>
-          </a:prstGeom>
-          <a:noFill/>
-        </p:spPr>
-        <p:txBody>
-          <a:bodyPr wrap="square">
-            <a:spAutoFit/>
-          </a:bodyPr>
-          <a:lstStyle/>
-          <a:p>
-            <a:pPr algn="l"/>
-            <a:r>
-              <a:rPr sz="1400" b="1">
-                <a:solidFill>
-                  <a:srgbClr val="555555"/>
-                </a:solidFill>
-                <a:latin typeface="Calibri"/>
-              </a:rPr>
-              <a:t>Round 2</a:t>
-            </a:r>
-          </a:p>
-        </p:txBody>
-      </p:sp>
-      <p:sp>
-        <p:nvSpPr>
-          <p:cNvPr id="12" name="TextBox 11"/>
-          <p:cNvSpPr txBox="1"/>
-          <p:nvPr/>
-        </p:nvSpPr>
-        <p:spPr>
-          <a:xfrm>
-            <a:off x="9235440" y="3200400"/>
-            <a:ext cx="914400" cy="457200"/>
-          </a:xfrm>
-          <a:prstGeom prst="rect">
-            <a:avLst/>
-          </a:prstGeom>
-          <a:noFill/>
-        </p:spPr>
-        <p:txBody>
-          <a:bodyPr wrap="square">
-            <a:spAutoFit/>
-          </a:bodyPr>
-          <a:lstStyle/>
-          <a:p>
-            <a:pPr algn="l"/>
-            <a:r>
-              <a:rPr sz="2400" b="1">
-                <a:solidFill>
-                  <a:srgbClr val="1F3A5F"/>
-                </a:solidFill>
-                <a:latin typeface="Calibri"/>
-              </a:rPr>
-              <a:t>0.64</a:t>
-            </a:r>
-          </a:p>
-        </p:txBody>
-      </p:sp>
-      <p:sp>
-        <p:nvSpPr>
-          <p:cNvPr id="13" name="TextBox 12"/>
-          <p:cNvSpPr txBox="1"/>
-          <p:nvPr/>
-        </p:nvSpPr>
-        <p:spPr>
-          <a:xfrm>
-            <a:off x="7863840" y="3657600"/>
-            <a:ext cx="3931920" cy="320040"/>
-          </a:xfrm>
-          <a:prstGeom prst="rect">
-            <a:avLst/>
-          </a:prstGeom>
-          <a:noFill/>
-        </p:spPr>
-        <p:txBody>
-          <a:bodyPr wrap="square">
-            <a:spAutoFit/>
-          </a:bodyPr>
-          <a:lstStyle/>
-          <a:p>
-            <a:pPr algn="l"/>
-            <a:r>
-              <a:rPr sz="1100" b="0">
-                <a:solidFill>
-                  <a:srgbClr val="555555"/>
-                </a:solidFill>
-                <a:latin typeface="Calibri"/>
-              </a:rPr>
-              <a:t>Detector has learned</a:t>
-            </a:r>
-          </a:p>
-        </p:txBody>
-      </p:sp>
-      <p:sp>
-        <p:nvSpPr>
-          <p:cNvPr id="14" name="TextBox 13"/>
-          <p:cNvSpPr txBox="1"/>
-          <p:nvPr/>
-        </p:nvSpPr>
-        <p:spPr>
-          <a:xfrm>
-            <a:off x="7863840" y="4023360"/>
-            <a:ext cx="1371600" cy="365760"/>
-          </a:xfrm>
-          <a:prstGeom prst="rect">
-            <a:avLst/>
-          </a:prstGeom>
-          <a:noFill/>
-        </p:spPr>
-        <p:txBody>
-          <a:bodyPr wrap="square">
-            <a:spAutoFit/>
-          </a:bodyPr>
-          <a:lstStyle/>
-          <a:p>
-            <a:pPr algn="l"/>
-            <a:r>
-              <a:rPr sz="1400" b="1">
-                <a:solidFill>
-                  <a:srgbClr val="555555"/>
-                </a:solidFill>
-                <a:latin typeface="Calibri"/>
-              </a:rPr>
-              <a:t>Round 3</a:t>
-            </a:r>
-          </a:p>
-        </p:txBody>
-      </p:sp>
-      <p:sp>
-        <p:nvSpPr>
-          <p:cNvPr id="15" name="TextBox 14"/>
-          <p:cNvSpPr txBox="1"/>
-          <p:nvPr/>
-        </p:nvSpPr>
-        <p:spPr>
-          <a:xfrm>
-            <a:off x="9235440" y="4023360"/>
-            <a:ext cx="914400" cy="457200"/>
-          </a:xfrm>
-          <a:prstGeom prst="rect">
-            <a:avLst/>
-          </a:prstGeom>
-          <a:noFill/>
-        </p:spPr>
-        <p:txBody>
-          <a:bodyPr wrap="square">
-            <a:spAutoFit/>
-          </a:bodyPr>
-          <a:lstStyle/>
-          <a:p>
-            <a:pPr algn="l"/>
-            <a:r>
-              <a:rPr sz="2400" b="1">
-                <a:solidFill>
-                  <a:srgbClr val="1F3A5F"/>
-                </a:solidFill>
-                <a:latin typeface="Calibri"/>
-              </a:rPr>
-              <a:t>0.54</a:t>
-            </a:r>
-          </a:p>
-        </p:txBody>
-      </p:sp>
-      <p:sp>
-        <p:nvSpPr>
-          <p:cNvPr id="16" name="TextBox 15"/>
-          <p:cNvSpPr txBox="1"/>
-          <p:nvPr/>
-        </p:nvSpPr>
-        <p:spPr>
-          <a:xfrm>
-            <a:off x="7863840" y="4480560"/>
-            <a:ext cx="3931920" cy="320040"/>
-          </a:xfrm>
-          <a:prstGeom prst="rect">
-            <a:avLst/>
-          </a:prstGeom>
-          <a:noFill/>
-        </p:spPr>
-        <p:txBody>
-          <a:bodyPr wrap="square">
-            <a:spAutoFit/>
-          </a:bodyPr>
-          <a:lstStyle/>
-          <a:p>
-            <a:pPr algn="l"/>
-            <a:r>
-              <a:rPr sz="1100" b="0">
-                <a:solidFill>
-                  <a:srgbClr val="555555"/>
-                </a:solidFill>
-                <a:latin typeface="Calibri"/>
-              </a:rPr>
-              <a:t>Detector has learned more</a:t>
-            </a:r>
-          </a:p>
-        </p:txBody>
-      </p:sp>
-      <p:sp>
-        <p:nvSpPr>
-          <p:cNvPr id="17" name="TextBox 16"/>
-          <p:cNvSpPr txBox="1"/>
-          <p:nvPr/>
-        </p:nvSpPr>
-        <p:spPr>
-          <a:xfrm>
-            <a:off x="7863840" y="5212080"/>
-            <a:ext cx="3931920" cy="457200"/>
-          </a:xfrm>
-          <a:prstGeom prst="rect">
-            <a:avLst/>
-          </a:prstGeom>
-          <a:noFill/>
-        </p:spPr>
-        <p:txBody>
-          <a:bodyPr wrap="square">
-            <a:spAutoFit/>
-          </a:bodyPr>
+              <a:t>mixed LLMs · n=200 · out-of-family</a:t>
+            </a:r>
+          </a:p>
+        </p:txBody>
+      </p:sp>
+      <p:sp>
+        <p:nvSpPr>
+          <p:cNvPr id="20" name="Rectangle 19"/>
+          <p:cNvSpPr/>
+          <p:nvPr/>
+        </p:nvSpPr>
+        <p:spPr>
+          <a:xfrm>
+            <a:off x="457200" y="5303520"/>
+            <a:ext cx="11247120" cy="1188720"/>
+          </a:xfrm>
+          <a:prstGeom prst="rect">
+            <a:avLst/>
+          </a:prstGeom>
+          <a:solidFill>
+            <a:srgbClr val="1F3A5F"/>
+          </a:solidFill>
+          <a:ln>
+            <a:noFill/>
+          </a:ln>
+          <a:effectLst/>
+        </p:spPr>
+        <p:style>
+          <a:lnRef idx="1">
+            <a:schemeClr val="accent1"/>
+          </a:lnRef>
+          <a:fillRef idx="3">
+            <a:schemeClr val="accent1"/>
+          </a:fillRef>
+          <a:effectRef idx="2">
+            <a:schemeClr val="accent1"/>
+          </a:effectRef>
+          <a:fontRef idx="minor">
+            <a:schemeClr val="lt1"/>
+          </a:fontRef>
+        </p:style>
+        <p:txBody>
+          <a:bodyPr rtlCol="0" anchor="ctr"/>
           <a:lstStyle/>
           <a:p>
             <a:pPr algn="ctr"/>
-            <a:r>
-              <a:rPr sz="2200" b="1">
-                <a:solidFill>
-                  <a:srgbClr val="E06C75"/>
-                </a:solidFill>
-                <a:latin typeface="Calibri"/>
-              </a:rPr>
-              <a:t>−27% relative</a:t>
-            </a:r>
-          </a:p>
-        </p:txBody>
-      </p:sp>
-      <p:sp>
-        <p:nvSpPr>
-          <p:cNvPr id="18" name="TextBox 17"/>
-          <p:cNvSpPr txBox="1"/>
-          <p:nvPr/>
-        </p:nvSpPr>
-        <p:spPr>
-          <a:xfrm>
-            <a:off x="7863840" y="5669280"/>
-            <a:ext cx="3931920" cy="320040"/>
+          </a:p>
+        </p:txBody>
+      </p:sp>
+      <p:sp>
+        <p:nvSpPr>
+          <p:cNvPr id="21" name="TextBox 20"/>
+          <p:cNvSpPr txBox="1"/>
+          <p:nvPr/>
+        </p:nvSpPr>
+        <p:spPr>
+          <a:xfrm>
+            <a:off x="640080" y="5440680"/>
+            <a:ext cx="10881360" cy="457200"/>
           </a:xfrm>
           <a:prstGeom prst="rect">
             <a:avLst/>
@@ -16146,20 +16293,57 @@
           <a:p>
             <a:pPr algn="ctr"/>
             <a:r>
+              <a:rPr sz="1800" b="1">
+                <a:solidFill>
+                  <a:srgbClr val="FFFFFF"/>
+                </a:solidFill>
+                <a:latin typeface="Calibri"/>
+              </a:rPr>
+              <a:t>The family matters more than rounds, rewrites, or retraining.</a:t>
+            </a:r>
+          </a:p>
+        </p:txBody>
+      </p:sp>
+      <p:sp>
+        <p:nvSpPr>
+          <p:cNvPr id="22" name="TextBox 21"/>
+          <p:cNvSpPr txBox="1"/>
+          <p:nvPr/>
+        </p:nvSpPr>
+        <p:spPr>
+          <a:xfrm>
+            <a:off x="640080" y="5852160"/>
+            <a:ext cx="10881360" cy="640080"/>
+          </a:xfrm>
+          <a:prstGeom prst="rect">
+            <a:avLst/>
+          </a:prstGeom>
+          <a:noFill/>
+        </p:spPr>
+        <p:txBody>
+          <a:bodyPr wrap="square">
+            <a:spAutoFit/>
+          </a:bodyPr>
+          <a:lstStyle/>
+          <a:p>
+            <a:pPr algn="ctr"/>
+            <a:r>
               <a:rPr sz="1200" b="0">
                 <a:solidFill>
-                  <a:srgbClr val="555555"/>
-                </a:solidFill>
-                <a:latin typeface="Calibri"/>
-              </a:rPr>
-              <a:t>(and outside the ±5% noise band)</a:t>
-            </a:r>
-          </a:p>
-        </p:txBody>
-      </p:sp>
-      <p:sp>
-        <p:nvSpPr>
-          <p:cNvPr id="19" name="TextBox 18"/>
+                  <a:srgbClr val="F5F5F0"/>
+                </a:solidFill>
+                <a:latin typeface="Calibri"/>
+              </a:rPr>
+              <a:t>A published detector has to disclose which generator family it was trained against.
+Our Condition B flat-line (at 3k) and the 500-scale 0.74 → 0.54 curve (likely noise at n=250)
+both point to the same lesson: pick your adversary carefully before measuring your loop.</a:t>
+            </a:r>
+          </a:p>
+        </p:txBody>
+      </p:sp>
+      <p:sp>
+        <p:nvSpPr>
+          <p:cNvPr id="23" name="TextBox 22"/>
           <p:cNvSpPr txBox="1"/>
           <p:nvPr/>
         </p:nvSpPr>
